--- a/Musonda Sinkala - Technical Interview - Ghamut.pptx
+++ b/Musonda Sinkala - Technical Interview - Ghamut.pptx
@@ -7025,42 +7025,6 @@
       </p:grpSpPr>
       <p:pic>
         <p:nvPicPr>
-          <p:cNvPr id="7" name="Picture 6" descr="A diagram of a diagram&#10;&#10;AI-generated content may be incorrect.">
-            <a:extLst>
-              <a:ext uri="{FF2B5EF4-FFF2-40B4-BE49-F238E27FC236}">
-                <a16:creationId xmlns:a16="http://schemas.microsoft.com/office/drawing/2014/main" id="{B999C177-6ED2-3A2F-757E-7D26441E9724}"/>
-              </a:ext>
-            </a:extLst>
-          </p:cNvPr>
-          <p:cNvPicPr>
-            <a:picLocks noChangeAspect="1"/>
-          </p:cNvPicPr>
-          <p:nvPr/>
-        </p:nvPicPr>
-        <p:blipFill>
-          <a:blip r:embed="rId3">
-            <a:extLst>
-              <a:ext uri="{28A0092B-C50C-407E-A947-70E740481C1C}">
-                <a14:useLocalDpi xmlns:a14="http://schemas.microsoft.com/office/drawing/2010/main" val="0"/>
-              </a:ext>
-            </a:extLst>
-          </a:blip>
-          <a:stretch>
-            <a:fillRect/>
-          </a:stretch>
-        </p:blipFill>
-        <p:spPr>
-          <a:xfrm>
-            <a:off x="432225" y="1949035"/>
-            <a:ext cx="11327549" cy="3115075"/>
-          </a:xfrm>
-          <a:prstGeom prst="rect">
-            <a:avLst/>
-          </a:prstGeom>
-        </p:spPr>
-      </p:pic>
-      <p:pic>
-        <p:nvPicPr>
           <p:cNvPr id="4" name="Picture 2" descr="Ghamut Corporation">
             <a:extLst>
               <a:ext uri="{FF2B5EF4-FFF2-40B4-BE49-F238E27FC236}">
@@ -7074,7 +7038,7 @@
           <p:nvPr/>
         </p:nvPicPr>
         <p:blipFill>
-          <a:blip r:embed="rId4">
+          <a:blip r:embed="rId3">
             <a:extLst>
               <a:ext uri="{28A0092B-C50C-407E-A947-70E740481C1C}">
                 <a14:useLocalDpi xmlns:a14="http://schemas.microsoft.com/office/drawing/2010/main" val="0"/>
@@ -7154,6 +7118,42 @@
           </a:p>
         </p:txBody>
       </p:sp>
+      <p:pic>
+        <p:nvPicPr>
+          <p:cNvPr id="5" name="Picture 4" descr="A diagram of a diagram&#10;&#10;AI-generated content may be incorrect.">
+            <a:extLst>
+              <a:ext uri="{FF2B5EF4-FFF2-40B4-BE49-F238E27FC236}">
+                <a16:creationId xmlns:a16="http://schemas.microsoft.com/office/drawing/2014/main" id="{DB6A38E6-EA4F-3F06-9BB2-F0B1E665ECE2}"/>
+              </a:ext>
+            </a:extLst>
+          </p:cNvPr>
+          <p:cNvPicPr>
+            <a:picLocks noChangeAspect="1"/>
+          </p:cNvPicPr>
+          <p:nvPr/>
+        </p:nvPicPr>
+        <p:blipFill>
+          <a:blip r:embed="rId4">
+            <a:extLst>
+              <a:ext uri="{28A0092B-C50C-407E-A947-70E740481C1C}">
+                <a14:useLocalDpi xmlns:a14="http://schemas.microsoft.com/office/drawing/2010/main" val="0"/>
+              </a:ext>
+            </a:extLst>
+          </a:blip>
+          <a:stretch>
+            <a:fillRect/>
+          </a:stretch>
+        </p:blipFill>
+        <p:spPr>
+          <a:xfrm>
+            <a:off x="337600" y="2033748"/>
+            <a:ext cx="11516800" cy="3181347"/>
+          </a:xfrm>
+          <a:prstGeom prst="rect">
+            <a:avLst/>
+          </a:prstGeom>
+        </p:spPr>
+      </p:pic>
     </p:spTree>
     <p:extLst>
       <p:ext uri="{BB962C8B-B14F-4D97-AF65-F5344CB8AC3E}">
@@ -11206,22 +11206,12 @@
           </a:p>
           <a:p>
             <a:r>
-              <a:rPr lang="en-US" sz="1400" dirty="0" err="1"/>
-              <a:t>Intergrate</a:t>
-            </a:r>
-            <a:r>
-              <a:rPr lang="en-US" sz="1400" dirty="0"/>
-              <a:t> more data sources.</a:t>
-            </a:r>
-          </a:p>
-          <a:p>
-            <a:r>
               <a:rPr lang="en-US" sz="1400" dirty="0"/>
               <a:t>Leverage LLMs (sentiment analysis and classifiers) to classify research as positive or negative in aims to determine the impact of publication sentiment on </a:t>
             </a:r>
             <a:r>
               <a:rPr lang="en-US" sz="1400" dirty="0" err="1"/>
-              <a:t>stockprive</a:t>
+              <a:t>stockprice</a:t>
             </a:r>
             <a:r>
               <a:rPr lang="en-US" sz="1400" dirty="0"/>
@@ -11231,7 +11221,7 @@
           <a:p>
             <a:r>
               <a:rPr lang="en-US" sz="1400" dirty="0"/>
-              <a:t>Investigate March spike in publications</a:t>
+              <a:t>Investigate March/April spike in publications</a:t>
             </a:r>
           </a:p>
         </p:txBody>
@@ -11464,7 +11454,7 @@
         <p:spPr>
           <a:xfrm>
             <a:off x="2222751" y="3313596"/>
-            <a:ext cx="3241303" cy="2142681"/>
+            <a:ext cx="3241303" cy="3068308"/>
           </a:xfrm>
           <a:prstGeom prst="rect">
             <a:avLst/>
@@ -11645,12 +11635,15 @@
             </a:r>
           </a:p>
           <a:p>
-            <a:endParaRPr lang="en-US" sz="1400" dirty="0"/>
-          </a:p>
-          <a:p>
             <a:r>
               <a:rPr lang="en-US" sz="1400" dirty="0"/>
               <a:t>Research activity may correlate with ETF movements but not cause them. Other features may be needed to determine causes of stock price movements.</a:t>
+            </a:r>
+          </a:p>
+          <a:p>
+            <a:r>
+              <a:rPr lang="en-US" sz="1400" dirty="0"/>
+              <a:t>The analysis uses a linear regression framework which prioritizes simplicity over complexity.</a:t>
             </a:r>
           </a:p>
         </p:txBody>

--- a/Musonda Sinkala - Technical Interview - Ghamut.pptx
+++ b/Musonda Sinkala - Technical Interview - Ghamut.pptx
@@ -10184,14 +10184,29 @@
             <a:r>
               <a:rPr lang="en-US" sz="4000" kern="1200" dirty="0">
                 <a:solidFill>
-                  <a:srgbClr val="FFFFFF"/>
+                  <a:schemeClr val="bg1"/>
                 </a:solidFill>
                 <a:latin typeface="+mj-lt"/>
                 <a:ea typeface="+mj-ea"/>
                 <a:cs typeface="+mj-cs"/>
+                <a:hlinkClick r:id="rId7">
+                  <a:extLst>
+                    <a:ext uri="{A12FA001-AC4F-418D-AE19-62706E023703}">
+                      <ahyp:hlinkClr xmlns:ahyp="http://schemas.microsoft.com/office/drawing/2018/hyperlinkcolor" val="tx"/>
+                    </a:ext>
+                  </a:extLst>
+                </a:hlinkClick>
               </a:rPr>
               <a:t>Insights</a:t>
             </a:r>
+            <a:endParaRPr lang="en-US" sz="4000" kern="1200" dirty="0">
+              <a:solidFill>
+                <a:schemeClr val="bg1"/>
+              </a:solidFill>
+              <a:latin typeface="+mj-lt"/>
+              <a:ea typeface="+mj-ea"/>
+              <a:cs typeface="+mj-cs"/>
+            </a:endParaRPr>
           </a:p>
         </p:txBody>
       </p:sp>
